--- a/assets/pptx/catalog-266.pptx
+++ b/assets/pptx/catalog-266.pptx
@@ -4117,7 +4117,7 @@
                 <a:ea typeface="Ebrima"/>
                 <a:cs typeface="Ebrima"/>
               </a:rPr>
-              <a:t>ጌታ ጥበብ ማስተዋል ዕውቀትን ስጠኝ (ለእኔ)</a:t>
+              <a:t>ጌታ ጥበብ ማስተዋል ዕውቀትን ስጠኝ ለእኔ</a:t>
             </a:r>
           </a:p>
           <a:p>
@@ -4153,7 +4153,7 @@
                 <a:ea typeface="Ebrima"/>
                 <a:cs typeface="Ebrima"/>
               </a:rPr>
-              <a:t>ጌታ ጥበብ ማስተዋል ዕውቀትን ስጠኝ (ለእኔ)</a:t>
+              <a:t>ጌታ ጥበብ ማስተዋል ዕውቀትን ስጠኝ ለእኔ</a:t>
             </a:r>
           </a:p>
         </p:txBody>
